--- a/Astro_Origin_table_horiz.pptx
+++ b/Astro_Origin_table_horiz.pptx
@@ -197,7 +197,7 @@
           <a:p>
             <a:fld id="{56190867-FD12-ED4C-AD02-12B91CD72869}" type="datetimeFigureOut">
               <a:rPr lang="en-US" smtClean="0"/>
-              <a:t>6/19/25</a:t>
+              <a:t>6/30/25</a:t>
             </a:fld>
             <a:endParaRPr lang="en-US"/>
           </a:p>
@@ -1038,7 +1038,7 @@
           <a:p>
             <a:fld id="{42B10BCD-A866-B34B-B7E8-44C4BB9D2819}" type="datetimeFigureOut">
               <a:rPr lang="en-US" smtClean="0"/>
-              <a:t>6/19/25</a:t>
+              <a:t>6/30/25</a:t>
             </a:fld>
             <a:endParaRPr lang="en-US"/>
           </a:p>
@@ -1208,7 +1208,7 @@
           <a:p>
             <a:fld id="{42B10BCD-A866-B34B-B7E8-44C4BB9D2819}" type="datetimeFigureOut">
               <a:rPr lang="en-US" smtClean="0"/>
-              <a:t>6/19/25</a:t>
+              <a:t>6/30/25</a:t>
             </a:fld>
             <a:endParaRPr lang="en-US"/>
           </a:p>
@@ -1388,7 +1388,7 @@
           <a:p>
             <a:fld id="{42B10BCD-A866-B34B-B7E8-44C4BB9D2819}" type="datetimeFigureOut">
               <a:rPr lang="en-US" smtClean="0"/>
-              <a:t>6/19/25</a:t>
+              <a:t>6/30/25</a:t>
             </a:fld>
             <a:endParaRPr lang="en-US"/>
           </a:p>
@@ -1619,7 +1619,7 @@
           <a:p>
             <a:fld id="{42B10BCD-A866-B34B-B7E8-44C4BB9D2819}" type="datetimeFigureOut">
               <a:rPr lang="en-US" smtClean="0"/>
-              <a:t>6/19/25</a:t>
+              <a:t>6/30/25</a:t>
             </a:fld>
             <a:endParaRPr lang="en-US"/>
           </a:p>
@@ -1865,7 +1865,7 @@
           <a:p>
             <a:fld id="{42B10BCD-A866-B34B-B7E8-44C4BB9D2819}" type="datetimeFigureOut">
               <a:rPr lang="en-US" smtClean="0"/>
-              <a:t>6/19/25</a:t>
+              <a:t>6/30/25</a:t>
             </a:fld>
             <a:endParaRPr lang="en-US"/>
           </a:p>
@@ -2097,7 +2097,7 @@
           <a:p>
             <a:fld id="{42B10BCD-A866-B34B-B7E8-44C4BB9D2819}" type="datetimeFigureOut">
               <a:rPr lang="en-US" smtClean="0"/>
-              <a:t>6/19/25</a:t>
+              <a:t>6/30/25</a:t>
             </a:fld>
             <a:endParaRPr lang="en-US"/>
           </a:p>
@@ -2464,7 +2464,7 @@
           <a:p>
             <a:fld id="{42B10BCD-A866-B34B-B7E8-44C4BB9D2819}" type="datetimeFigureOut">
               <a:rPr lang="en-US" smtClean="0"/>
-              <a:t>6/19/25</a:t>
+              <a:t>6/30/25</a:t>
             </a:fld>
             <a:endParaRPr lang="en-US"/>
           </a:p>
@@ -2582,7 +2582,7 @@
           <a:p>
             <a:fld id="{42B10BCD-A866-B34B-B7E8-44C4BB9D2819}" type="datetimeFigureOut">
               <a:rPr lang="en-US" smtClean="0"/>
-              <a:t>6/19/25</a:t>
+              <a:t>6/30/25</a:t>
             </a:fld>
             <a:endParaRPr lang="en-US"/>
           </a:p>
@@ -2677,7 +2677,7 @@
           <a:p>
             <a:fld id="{42B10BCD-A866-B34B-B7E8-44C4BB9D2819}" type="datetimeFigureOut">
               <a:rPr lang="en-US" smtClean="0"/>
-              <a:t>6/19/25</a:t>
+              <a:t>6/30/25</a:t>
             </a:fld>
             <a:endParaRPr lang="en-US"/>
           </a:p>
@@ -2954,7 +2954,7 @@
           <a:p>
             <a:fld id="{42B10BCD-A866-B34B-B7E8-44C4BB9D2819}" type="datetimeFigureOut">
               <a:rPr lang="en-US" smtClean="0"/>
-              <a:t>6/19/25</a:t>
+              <a:t>6/30/25</a:t>
             </a:fld>
             <a:endParaRPr lang="en-US"/>
           </a:p>
@@ -3211,7 +3211,7 @@
           <a:p>
             <a:fld id="{42B10BCD-A866-B34B-B7E8-44C4BB9D2819}" type="datetimeFigureOut">
               <a:rPr lang="en-US" smtClean="0"/>
-              <a:t>6/19/25</a:t>
+              <a:t>6/30/25</a:t>
             </a:fld>
             <a:endParaRPr lang="en-US"/>
           </a:p>
@@ -3424,7 +3424,7 @@
           <a:p>
             <a:fld id="{42B10BCD-A866-B34B-B7E8-44C4BB9D2819}" type="datetimeFigureOut">
               <a:rPr lang="en-US" smtClean="0"/>
-              <a:t>6/19/25</a:t>
+              <a:t>6/30/25</a:t>
             </a:fld>
             <a:endParaRPr lang="en-US"/>
           </a:p>
@@ -12939,11 +12939,10 @@
             <a:pPr algn="ctr"/>
             <a:r>
               <a:rPr lang="en-US" sz="2400" dirty="0">
-                <a:latin typeface="Arial" panose="020B0604020202020204" pitchFamily="34" charset="0"/>
+                <a:latin typeface="Latin Modern Math" panose="02000503000000000000" pitchFamily="2" charset="77"/>
                 <a:ea typeface="Latin Modern Math" panose="02000503000000000000" pitchFamily="2" charset="77"/>
-                <a:cs typeface="Arial" panose="020B0604020202020204" pitchFamily="34" charset="0"/>
               </a:rPr>
-              <a:t>X</a:t>
+              <a:t>✓</a:t>
             </a:r>
             <a:endParaRPr lang="en-US" sz="2400" dirty="0">
               <a:latin typeface="Arial" panose="020B0604020202020204" pitchFamily="34" charset="0"/>
